--- a/Presentation_Deck.pptx
+++ b/Presentation_Deck.pptx
@@ -128,6 +128,81 @@
 </p:presentation>
 </file>
 
+<file path=ppt/revisionInfo.xml><?xml version="1.0" encoding="utf-8"?>
+<p1510:revInfo xmlns:a="http://schemas.openxmlformats.org/drawingml/2006/main" xmlns:r="http://schemas.openxmlformats.org/officeDocument/2006/relationships" xmlns:p1510="http://schemas.microsoft.com/office/powerpoint/2015/10/main">
+  <p1510:revLst>
+    <p1510:client id="{10AF77A6-31C5-4844-9330-AEA780D53B8B}" v="7" dt="2026-03-11T17:22:16.332"/>
+  </p1510:revLst>
+</p1510:revInfo>
+</file>
+
+<file path=ppt/changesInfos/changesInfo1.xml><?xml version="1.0" encoding="utf-8"?>
+<pc:chgInfo xmlns:a="http://schemas.openxmlformats.org/drawingml/2006/main" xmlns:r="http://schemas.openxmlformats.org/officeDocument/2006/relationships" xmlns:ac="http://schemas.microsoft.com/office/drawing/2013/main/command" xmlns:pc="http://schemas.microsoft.com/office/powerpoint/2013/main/command">
+  <pc:docChgLst>
+    <pc:chgData name="Matthew Wilson" userId="d30e82ce5d04d96e" providerId="LiveId" clId="{D2507071-FEA3-4BC0-92A6-71207631F648}"/>
+    <pc:docChg chg="undo custSel modSld">
+      <pc:chgData name="Matthew Wilson" userId="d30e82ce5d04d96e" providerId="LiveId" clId="{D2507071-FEA3-4BC0-92A6-71207631F648}" dt="2026-03-11T17:22:17.067" v="455" actId="20577"/>
+      <pc:docMkLst>
+        <pc:docMk/>
+      </pc:docMkLst>
+      <pc:sldChg chg="modSp mod">
+        <pc:chgData name="Matthew Wilson" userId="d30e82ce5d04d96e" providerId="LiveId" clId="{D2507071-FEA3-4BC0-92A6-71207631F648}" dt="2026-03-11T15:39:17.075" v="255" actId="20577"/>
+        <pc:sldMkLst>
+          <pc:docMk/>
+          <pc:sldMk cId="4216523365" sldId="257"/>
+        </pc:sldMkLst>
+        <pc:spChg chg="mod">
+          <ac:chgData name="Matthew Wilson" userId="d30e82ce5d04d96e" providerId="LiveId" clId="{D2507071-FEA3-4BC0-92A6-71207631F648}" dt="2026-03-11T15:39:17.075" v="255" actId="20577"/>
+          <ac:spMkLst>
+            <pc:docMk/>
+            <pc:sldMk cId="4216523365" sldId="257"/>
+            <ac:spMk id="3" creationId="{432C04E6-B771-F1FA-85F4-B7984DE55A8E}"/>
+          </ac:spMkLst>
+        </pc:spChg>
+      </pc:sldChg>
+      <pc:sldChg chg="modSp mod">
+        <pc:chgData name="Matthew Wilson" userId="d30e82ce5d04d96e" providerId="LiveId" clId="{D2507071-FEA3-4BC0-92A6-71207631F648}" dt="2026-03-11T17:22:17.067" v="455" actId="20577"/>
+        <pc:sldMkLst>
+          <pc:docMk/>
+          <pc:sldMk cId="1384372434" sldId="269"/>
+        </pc:sldMkLst>
+        <pc:graphicFrameChg chg="mod modGraphic">
+          <ac:chgData name="Matthew Wilson" userId="d30e82ce5d04d96e" providerId="LiveId" clId="{D2507071-FEA3-4BC0-92A6-71207631F648}" dt="2026-03-11T17:22:17.067" v="455" actId="20577"/>
+          <ac:graphicFrameMkLst>
+            <pc:docMk/>
+            <pc:sldMk cId="1384372434" sldId="269"/>
+            <ac:graphicFrameMk id="6" creationId="{3E0E4A8A-55D4-88B9-EAFE-F5DD91417A46}"/>
+          </ac:graphicFrameMkLst>
+        </pc:graphicFrameChg>
+      </pc:sldChg>
+      <pc:sldChg chg="modSp mod">
+        <pc:chgData name="Matthew Wilson" userId="d30e82ce5d04d96e" providerId="LiveId" clId="{D2507071-FEA3-4BC0-92A6-71207631F648}" dt="2026-03-11T15:37:21.762" v="72" actId="20577"/>
+        <pc:sldMkLst>
+          <pc:docMk/>
+          <pc:sldMk cId="4182614578" sldId="2767"/>
+        </pc:sldMkLst>
+        <pc:spChg chg="mod">
+          <ac:chgData name="Matthew Wilson" userId="d30e82ce5d04d96e" providerId="LiveId" clId="{D2507071-FEA3-4BC0-92A6-71207631F648}" dt="2026-03-11T15:37:21.762" v="72" actId="20577"/>
+          <ac:spMkLst>
+            <pc:docMk/>
+            <pc:sldMk cId="4182614578" sldId="2767"/>
+            <ac:spMk id="2" creationId="{900A38E9-D21E-DE68-38AC-F56AEA15B379}"/>
+          </ac:spMkLst>
+        </pc:spChg>
+        <pc:spChg chg="mod">
+          <ac:chgData name="Matthew Wilson" userId="d30e82ce5d04d96e" providerId="LiveId" clId="{D2507071-FEA3-4BC0-92A6-71207631F648}" dt="2026-03-11T15:37:13.546" v="56" actId="20577"/>
+          <ac:spMkLst>
+            <pc:docMk/>
+            <pc:sldMk cId="4182614578" sldId="2767"/>
+            <ac:spMk id="3" creationId="{7604D864-A6BD-C75F-9B88-BAB58775ABDD}"/>
+          </ac:spMkLst>
+        </pc:spChg>
+      </pc:sldChg>
+    </pc:docChg>
+  </pc:docChgLst>
+</pc:chgInfo>
+</file>
+
 <file path=ppt/notesMasters/notesMaster1.xml><?xml version="1.0" encoding="utf-8"?>
 <p:notesMaster xmlns:a="http://schemas.openxmlformats.org/drawingml/2006/main" xmlns:r="http://schemas.openxmlformats.org/officeDocument/2006/relationships" xmlns:p="http://schemas.openxmlformats.org/presentationml/2006/main">
   <p:cSld>
@@ -209,7 +284,7 @@
           </a:lstStyle>
           <a:p>
             <a:fld id="{3C2D05EE-1874-40CA-ACBB-AAFE8CEAEC56}" type="datetimeFigureOut">
-              <a:t>3/2/2026</a:t>
+              <a:t>3/11/2026</a:t>
             </a:fld>
             <a:endParaRPr lang="en-US" dirty="0"/>
           </a:p>
@@ -897,7 +972,7 @@
           <a:p>
             <a:fld id="{B04EF954-66B1-4168-AF40-97F3DAF43FC4}" type="datetime1">
               <a:rPr lang="en-US" smtClean="0"/>
-              <a:t>3/2/2026</a:t>
+              <a:t>3/11/2026</a:t>
             </a:fld>
             <a:endParaRPr lang="en-US" dirty="0"/>
           </a:p>
@@ -1301,7 +1376,7 @@
           <a:p>
             <a:fld id="{C747D10D-DAA6-49BD-BCDC-42DE71F72A89}" type="datetime1">
               <a:rPr lang="en-US" smtClean="0"/>
-              <a:t>3/2/2026</a:t>
+              <a:t>3/11/2026</a:t>
             </a:fld>
             <a:endParaRPr lang="en-US" dirty="0"/>
           </a:p>
@@ -1700,7 +1775,7 @@
           <a:p>
             <a:fld id="{9A99C55D-C47D-42B9-AD20-3E2CCE08596C}" type="datetime1">
               <a:rPr lang="en-US" smtClean="0"/>
-              <a:t>3/2/2026</a:t>
+              <a:t>3/11/2026</a:t>
             </a:fld>
             <a:endParaRPr lang="en-US" dirty="0"/>
           </a:p>
@@ -1935,7 +2010,7 @@
           <a:p>
             <a:fld id="{01EA44AD-1FB0-4882-B380-D102D5E41B49}" type="datetime1">
               <a:rPr lang="en-US" smtClean="0"/>
-              <a:t>3/2/2026</a:t>
+              <a:t>3/11/2026</a:t>
             </a:fld>
             <a:endParaRPr lang="en-US" dirty="0"/>
           </a:p>
@@ -2170,7 +2245,7 @@
           <a:p>
             <a:fld id="{C21FD0E9-BB2A-40F4-9FCA-339953EA9BCB}" type="datetime1">
               <a:rPr lang="en-US" smtClean="0"/>
-              <a:t>3/2/2026</a:t>
+              <a:t>3/11/2026</a:t>
             </a:fld>
             <a:endParaRPr lang="en-US" dirty="0"/>
           </a:p>
@@ -2387,7 +2462,7 @@
           <a:p>
             <a:fld id="{B82DCE86-7B4C-43EC-801D-4B957536C306}" type="datetime1">
               <a:rPr lang="en-US" smtClean="0"/>
-              <a:t>3/2/2026</a:t>
+              <a:t>3/11/2026</a:t>
             </a:fld>
             <a:endParaRPr lang="en-US" dirty="0"/>
           </a:p>
@@ -2622,7 +2697,7 @@
           <a:p>
             <a:fld id="{1FD3FCD9-BE24-4676-9D2E-63D9ED82EDA2}" type="datetime1">
               <a:rPr lang="en-US" smtClean="0"/>
-              <a:t>3/2/2026</a:t>
+              <a:t>3/11/2026</a:t>
             </a:fld>
             <a:endParaRPr lang="en-US" dirty="0"/>
           </a:p>
@@ -2839,7 +2914,7 @@
           <a:p>
             <a:fld id="{21CA290A-121B-47D5-B4CD-63E70D76A5D5}" type="datetime1">
               <a:rPr lang="en-US" smtClean="0"/>
-              <a:t>3/2/2026</a:t>
+              <a:t>3/11/2026</a:t>
             </a:fld>
             <a:endParaRPr lang="en-US" dirty="0"/>
           </a:p>
@@ -3159,7 +3234,7 @@
           <a:p>
             <a:fld id="{260A58D8-7EDF-40A6-A98C-8CBDF59A319E}" type="datetime1">
               <a:rPr lang="en-US" smtClean="0"/>
-              <a:t>3/2/2026</a:t>
+              <a:t>3/11/2026</a:t>
             </a:fld>
             <a:endParaRPr lang="en-US" dirty="0"/>
           </a:p>
@@ -3507,7 +3582,7 @@
           <a:p>
             <a:fld id="{16DF7C3E-B5DF-4043-B2F9-CD94B277B81B}" type="datetime1">
               <a:rPr lang="en-US" smtClean="0"/>
-              <a:t>3/2/2026</a:t>
+              <a:t>3/11/2026</a:t>
             </a:fld>
             <a:endParaRPr lang="en-US" dirty="0"/>
           </a:p>
@@ -3854,7 +3929,7 @@
           <a:p>
             <a:fld id="{84F04B89-F088-43E2-8F95-5A2E5E9F612E}" type="datetime1">
               <a:rPr lang="en-US" smtClean="0"/>
-              <a:t>3/2/2026</a:t>
+              <a:t>3/11/2026</a:t>
             </a:fld>
             <a:endParaRPr lang="en-US" dirty="0"/>
           </a:p>
@@ -4139,7 +4214,7 @@
           <a:p>
             <a:fld id="{26233410-150A-4A72-BF63-6D3ACBC30148}" type="datetime1">
               <a:rPr lang="en-US" smtClean="0"/>
-              <a:t>3/2/2026</a:t>
+              <a:t>3/11/2026</a:t>
             </a:fld>
             <a:endParaRPr lang="en-US" dirty="0"/>
           </a:p>
@@ -4491,7 +4566,7 @@
           <a:p>
             <a:fld id="{A0FCFF8D-E3E3-4D6C-85D1-1D24204FD961}" type="datetime1">
               <a:rPr lang="en-US" smtClean="0"/>
-              <a:t>3/2/2026</a:t>
+              <a:t>3/11/2026</a:t>
             </a:fld>
             <a:endParaRPr lang="en-US" dirty="0"/>
           </a:p>
@@ -4845,7 +4920,7 @@
           <a:p>
             <a:fld id="{1479AD81-0F74-4052-9D15-1FCBE10FF531}" type="datetime1">
               <a:rPr lang="en-US" smtClean="0"/>
-              <a:t>3/2/2026</a:t>
+              <a:t>3/11/2026</a:t>
             </a:fld>
             <a:endParaRPr lang="en-US" dirty="0"/>
           </a:p>
@@ -5212,7 +5287,7 @@
           <a:p>
             <a:fld id="{58567813-D47B-4BA9-A366-45E7794B6608}" type="datetime1">
               <a:rPr lang="en-US" smtClean="0"/>
-              <a:t>3/2/2026</a:t>
+              <a:t>3/11/2026</a:t>
             </a:fld>
             <a:endParaRPr lang="en-US" dirty="0"/>
           </a:p>
@@ -5580,7 +5655,7 @@
           <a:p>
             <a:fld id="{D3C75A4F-7395-44C0-9A76-83F0F6EA512A}" type="datetime1">
               <a:rPr lang="en-US" smtClean="0"/>
-              <a:t>3/2/2026</a:t>
+              <a:t>3/11/2026</a:t>
             </a:fld>
             <a:endParaRPr lang="en-US" dirty="0"/>
           </a:p>
@@ -5935,7 +6010,7 @@
           <a:p>
             <a:fld id="{1B2EEDCC-520A-464B-900A-5F7E0E1FFC43}" type="datetime1">
               <a:rPr lang="en-US" smtClean="0"/>
-              <a:t>3/2/2026</a:t>
+              <a:t>3/11/2026</a:t>
             </a:fld>
             <a:endParaRPr lang="en-US" dirty="0"/>
           </a:p>
@@ -6264,7 +6339,7 @@
           <a:p>
             <a:fld id="{B36C1D43-E95A-44CE-BF39-AC264176BC74}" type="datetime1">
               <a:rPr lang="en-US" smtClean="0"/>
-              <a:t>3/2/2026</a:t>
+              <a:t>3/11/2026</a:t>
             </a:fld>
             <a:endParaRPr lang="en-US" dirty="0"/>
           </a:p>
@@ -6584,7 +6659,7 @@
           <a:p>
             <a:fld id="{6F84395D-714C-468A-B505-16E3BDC41D6C}" type="datetime1">
               <a:rPr lang="en-US" smtClean="0"/>
-              <a:t>3/2/2026</a:t>
+              <a:t>3/11/2026</a:t>
             </a:fld>
             <a:endParaRPr lang="en-US" dirty="0"/>
           </a:p>
@@ -6932,7 +7007,7 @@
           <a:p>
             <a:fld id="{4009D615-5030-44BE-B1E7-FCAF557FFC34}" type="datetime1">
               <a:rPr lang="en-US" smtClean="0"/>
-              <a:t>3/2/2026</a:t>
+              <a:t>3/11/2026</a:t>
             </a:fld>
             <a:endParaRPr lang="en-US" dirty="0"/>
           </a:p>
@@ -7252,7 +7327,7 @@
           <a:p>
             <a:fld id="{A65D8DDD-BB5E-4F5B-81F2-5E5F98B403C0}" type="datetime1">
               <a:rPr lang="en-US" smtClean="0"/>
-              <a:t>3/2/2026</a:t>
+              <a:t>3/11/2026</a:t>
             </a:fld>
             <a:endParaRPr lang="en-US" dirty="0"/>
           </a:p>
@@ -7596,7 +7671,7 @@
           <a:p>
             <a:fld id="{083588C5-4E32-4E6E-80AB-32A6125C957F}" type="datetime1">
               <a:rPr lang="en-US" smtClean="0"/>
-              <a:t>3/2/2026</a:t>
+              <a:t>3/11/2026</a:t>
             </a:fld>
             <a:endParaRPr lang="en-US" dirty="0"/>
           </a:p>
@@ -7894,7 +7969,7 @@
           <a:p>
             <a:fld id="{91AF1D09-6B76-4716-AD3D-9F53166D3BF5}" type="datetime1">
               <a:rPr lang="en-US" smtClean="0"/>
-              <a:t>3/2/2026</a:t>
+              <a:t>3/11/2026</a:t>
             </a:fld>
             <a:endParaRPr lang="en-US" dirty="0"/>
           </a:p>
@@ -8228,7 +8303,7 @@
           <a:p>
             <a:fld id="{B337EAFE-6A88-4B1F-9ABC-CA3CFB830DD6}" type="datetime1">
               <a:rPr lang="en-US" smtClean="0"/>
-              <a:t>3/2/2026</a:t>
+              <a:t>3/11/2026</a:t>
             </a:fld>
             <a:endParaRPr lang="en-US" dirty="0"/>
           </a:p>
@@ -8548,7 +8623,7 @@
           <a:p>
             <a:fld id="{9EF70683-5F2F-44F3-8B59-45258C4FD45A}" type="datetime1">
               <a:rPr lang="en-US" smtClean="0"/>
-              <a:t>3/2/2026</a:t>
+              <a:t>3/11/2026</a:t>
             </a:fld>
             <a:endParaRPr lang="en-US" dirty="0"/>
           </a:p>
@@ -8892,7 +8967,7 @@
           <a:p>
             <a:fld id="{813EDC87-0EBE-4D2E-8804-E5F0EDA0B797}" type="datetime1">
               <a:rPr lang="en-US" smtClean="0"/>
-              <a:t>3/2/2026</a:t>
+              <a:t>3/11/2026</a:t>
             </a:fld>
             <a:endParaRPr lang="en-US" dirty="0"/>
           </a:p>
@@ -9223,7 +9298,7 @@
           <a:p>
             <a:fld id="{51CF56A9-FD41-47F4-80A0-DA74EEEC2541}" type="datetime1">
               <a:rPr lang="en-US" smtClean="0"/>
-              <a:t>3/2/2026</a:t>
+              <a:t>3/11/2026</a:t>
             </a:fld>
             <a:endParaRPr lang="en-US" dirty="0"/>
           </a:p>
@@ -9383,7 +9458,7 @@
           <a:p>
             <a:fld id="{A4CBD270-9BF1-4C68-A7FA-BA016D8BB959}" type="datetime1">
               <a:rPr lang="en-US" smtClean="0"/>
-              <a:t>3/2/2026</a:t>
+              <a:t>3/11/2026</a:t>
             </a:fld>
             <a:endParaRPr lang="en-US" dirty="0"/>
           </a:p>
@@ -9642,7 +9717,7 @@
           <a:p>
             <a:fld id="{E023AFB7-90A6-428C-A019-BBE6272496B8}" type="datetime1">
               <a:rPr lang="en-US" smtClean="0"/>
-              <a:t>3/2/2026</a:t>
+              <a:t>3/11/2026</a:t>
             </a:fld>
             <a:endParaRPr lang="en-US" dirty="0"/>
           </a:p>
@@ -10104,7 +10179,7 @@
           <a:p>
             <a:fld id="{09E47A9E-7C3C-4663-841E-C89520FA85A3}" type="datetime1">
               <a:rPr lang="en-US" smtClean="0"/>
-              <a:t>3/2/2026</a:t>
+              <a:t>3/11/2026</a:t>
             </a:fld>
             <a:endParaRPr lang="en-US" dirty="0"/>
           </a:p>
@@ -10385,7 +10460,7 @@
           <a:p>
             <a:fld id="{42FED8FD-3F8D-425F-9991-7FB6FCCEC5A2}" type="datetime1">
               <a:rPr lang="en-US" smtClean="0"/>
-              <a:t>3/2/2026</a:t>
+              <a:t>3/11/2026</a:t>
             </a:fld>
             <a:endParaRPr lang="en-US" dirty="0"/>
           </a:p>
@@ -10771,7 +10846,7 @@
           <a:p>
             <a:fld id="{5BD6B3E3-A05B-4311-9C9A-DA8A512CAB97}" type="datetime1">
               <a:rPr lang="en-US" smtClean="0"/>
-              <a:t>3/2/2026</a:t>
+              <a:t>3/11/2026</a:t>
             </a:fld>
             <a:endParaRPr lang="en-US" dirty="0"/>
           </a:p>
@@ -11157,7 +11232,7 @@
           <a:p>
             <a:fld id="{FAEFBAE2-1C27-41D0-8DBA-D202F753417F}" type="datetime1">
               <a:rPr lang="en-US" smtClean="0"/>
-              <a:t>3/2/2026</a:t>
+              <a:t>3/11/2026</a:t>
             </a:fld>
             <a:endParaRPr lang="en-US" dirty="0"/>
           </a:p>
@@ -11480,7 +11555,7 @@
           <a:p>
             <a:fld id="{FE21D4C7-8630-4B98-978C-30388BBD4EE8}" type="datetime1">
               <a:rPr lang="en-US" smtClean="0"/>
-              <a:t>3/2/2026</a:t>
+              <a:t>3/11/2026</a:t>
             </a:fld>
             <a:endParaRPr lang="en-US" dirty="0"/>
           </a:p>
@@ -11638,7 +11713,7 @@
           <a:p>
             <a:fld id="{6A453612-8941-41EA-ABBA-F717A06C8346}" type="datetime1">
               <a:rPr lang="en-US" smtClean="0"/>
-              <a:t>3/2/2026</a:t>
+              <a:t>3/11/2026</a:t>
             </a:fld>
             <a:endParaRPr lang="en-US" dirty="0"/>
           </a:p>
@@ -12038,7 +12113,7 @@
           <a:p>
             <a:fld id="{73D6CD22-E4B3-48A1-94CA-B89DB574ED80}" type="datetime1">
               <a:rPr lang="en-US" smtClean="0"/>
-              <a:t>3/2/2026</a:t>
+              <a:t>3/11/2026</a:t>
             </a:fld>
             <a:endParaRPr lang="en-US" dirty="0"/>
           </a:p>
@@ -12374,7 +12449,7 @@
           <a:p>
             <a:fld id="{97C38B47-093E-417D-A1C3-81EEF797AC69}" type="datetime1">
               <a:rPr lang="en-US" smtClean="0"/>
-              <a:t>3/2/2026</a:t>
+              <a:t>3/11/2026</a:t>
             </a:fld>
             <a:endParaRPr lang="en-US" dirty="0"/>
           </a:p>
@@ -12619,7 +12694,7 @@
           <a:p>
             <a:fld id="{A250925D-4314-49E4-A383-289640FEB5E3}" type="datetime1">
               <a:rPr lang="en-US" smtClean="0"/>
-              <a:t>3/2/2026</a:t>
+              <a:t>3/11/2026</a:t>
             </a:fld>
             <a:endParaRPr lang="en-US" dirty="0"/>
           </a:p>
@@ -12892,7 +12967,7 @@
           <a:p>
             <a:fld id="{EE2C59E0-667A-459A-BBD1-70DA72C3C576}" type="datetime1">
               <a:rPr lang="en-US" smtClean="0"/>
-              <a:t>3/2/2026</a:t>
+              <a:t>3/11/2026</a:t>
             </a:fld>
             <a:endParaRPr lang="en-US" dirty="0"/>
           </a:p>
@@ -13317,7 +13392,7 @@
           <a:p>
             <a:fld id="{706CC00B-2F01-4379-B0FD-8DA094C16FA4}" type="datetime1">
               <a:rPr lang="en-US" smtClean="0"/>
-              <a:t>3/2/2026</a:t>
+              <a:t>3/11/2026</a:t>
             </a:fld>
             <a:endParaRPr lang="en-US" dirty="0"/>
           </a:p>
@@ -13652,7 +13727,7 @@
           <a:p>
             <a:fld id="{5019F103-9E7C-4D5A-827C-0D2D66EE1CD2}" type="datetime1">
               <a:rPr lang="en-US" smtClean="0"/>
-              <a:t>3/2/2026</a:t>
+              <a:t>3/11/2026</a:t>
             </a:fld>
             <a:endParaRPr lang="en-US" dirty="0"/>
           </a:p>
@@ -14019,7 +14094,7 @@
           <a:p>
             <a:fld id="{8C13480A-5F85-4A30-80F2-F92581C6474C}" type="datetime1">
               <a:rPr lang="en-US" smtClean="0"/>
-              <a:t>3/2/2026</a:t>
+              <a:t>3/11/2026</a:t>
             </a:fld>
             <a:endParaRPr lang="en-US" dirty="0"/>
           </a:p>
@@ -14422,7 +14497,7 @@
           <a:p>
             <a:fld id="{B2BF18D3-87BE-4A2D-AD2C-B21E415FD900}" type="datetime1">
               <a:rPr lang="en-US" smtClean="0"/>
-              <a:t>3/2/2026</a:t>
+              <a:t>3/11/2026</a:t>
             </a:fld>
             <a:endParaRPr lang="en-US" dirty="0"/>
           </a:p>
@@ -14813,7 +14888,7 @@
           <a:p>
             <a:fld id="{73F0B94E-0195-4FC9-AEFD-CCBB878ACEDF}" type="datetime1">
               <a:rPr lang="en-US" smtClean="0"/>
-              <a:t>3/2/2026</a:t>
+              <a:t>3/11/2026</a:t>
             </a:fld>
             <a:endParaRPr lang="en-US" dirty="0"/>
           </a:p>
@@ -15204,7 +15279,7 @@
           <a:p>
             <a:fld id="{9B0F68CC-6BDD-49E7-8971-97164A4B1FA2}" type="datetime1">
               <a:rPr lang="en-US" smtClean="0"/>
-              <a:t>3/2/2026</a:t>
+              <a:t>3/11/2026</a:t>
             </a:fld>
             <a:endParaRPr lang="en-US" dirty="0"/>
           </a:p>
@@ -15489,7 +15564,7 @@
           <a:p>
             <a:fld id="{E244D5D5-F2FF-4BCB-BACC-FA9A736697CB}" type="datetime1">
               <a:rPr lang="en-US" smtClean="0"/>
-              <a:t>3/2/2026</a:t>
+              <a:t>3/11/2026</a:t>
             </a:fld>
             <a:endParaRPr lang="en-US" dirty="0"/>
           </a:p>
@@ -15731,7 +15806,7 @@
           <a:p>
             <a:fld id="{072E1B28-DB45-4001-B295-7D7933E04419}" type="datetime1">
               <a:rPr lang="en-US" smtClean="0"/>
-              <a:t>3/2/2026</a:t>
+              <a:t>3/11/2026</a:t>
             </a:fld>
             <a:endParaRPr lang="en-US" dirty="0"/>
           </a:p>
@@ -16230,7 +16305,7 @@
           <a:p>
             <a:r>
               <a:rPr lang="en-US" dirty="0"/>
-              <a:t>BASIC PRESENTATION</a:t>
+              <a:t>Forecasting 2025</a:t>
             </a:r>
           </a:p>
         </p:txBody>
@@ -16265,7 +16340,7 @@
           <a:p>
             <a:r>
               <a:rPr lang="en-US" dirty="0"/>
-              <a:t>Presented by Ares Grau</a:t>
+              <a:t>Matthew Wilson, Corbin Brinkerhoff, Matt Heaton</a:t>
             </a:r>
           </a:p>
         </p:txBody>
@@ -16299,7 +16374,7 @@
             <a:pPr lvl="0"/>
             <a:fld id="{A2C196D7-201A-4A3A-B9FA-EDBCED2083FF}" type="datetime1">
               <a:rPr lang="en-US" noProof="0" smtClean="0"/>
-              <a:t>3/2/2026</a:t>
+              <a:t>3/11/2026</a:t>
             </a:fld>
             <a:endParaRPr lang="en-US" noProof="0" dirty="0"/>
           </a:p>
@@ -16494,7 +16569,7 @@
           <a:p>
             <a:fld id="{1D7EE0C6-06DB-432B-A080-77CD90ED5127}" type="datetime1">
               <a:rPr lang="en-US" smtClean="0"/>
-              <a:t>3/2/2026</a:t>
+              <a:t>3/11/2026</a:t>
             </a:fld>
             <a:endParaRPr lang="en-US" dirty="0"/>
           </a:p>
@@ -16799,7 +16874,7 @@
           <a:p>
             <a:fld id="{83D0F5D8-D5B8-4089-B8CF-3C65B488B2D1}" type="datetime1">
               <a:rPr lang="en-US" smtClean="0"/>
-              <a:t>3/2/2026</a:t>
+              <a:t>3/11/2026</a:t>
             </a:fld>
             <a:endParaRPr lang="en-US" dirty="0"/>
           </a:p>
@@ -16990,7 +17065,7 @@
           <a:p>
             <a:fld id="{D9D5E90F-DD16-4D07-98B2-5ADD02240C41}" type="datetime1">
               <a:rPr lang="en-US" smtClean="0"/>
-              <a:t>3/2/2026</a:t>
+              <a:t>3/11/2026</a:t>
             </a:fld>
             <a:endParaRPr lang="en-US" dirty="0"/>
           </a:p>
@@ -17174,7 +17249,7 @@
           <a:p>
             <a:fld id="{C769AFF9-B37A-4509-BBAB-27DBFDFA26BE}" type="datetime1">
               <a:rPr lang="en-US" smtClean="0"/>
-              <a:t>3/2/2026</a:t>
+              <a:t>3/11/2026</a:t>
             </a:fld>
             <a:endParaRPr lang="en-US" dirty="0"/>
           </a:p>
@@ -17391,7 +17466,7 @@
           <a:p>
             <a:fld id="{042B170B-54FF-401A-804E-64B53FFEC9A3}" type="datetime1">
               <a:rPr lang="en-US" smtClean="0"/>
-              <a:t>3/2/2026</a:t>
+              <a:t>3/11/2026</a:t>
             </a:fld>
             <a:endParaRPr lang="en-US" dirty="0"/>
           </a:p>
@@ -17549,31 +17624,31 @@
           <a:p>
             <a:r>
               <a:rPr lang="en-US" dirty="0"/>
-              <a:t>Introducing yourself</a:t>
+              <a:t>Current Model</a:t>
             </a:r>
           </a:p>
           <a:p>
             <a:r>
               <a:rPr lang="en-US" dirty="0"/>
-              <a:t>Engaging the audience</a:t>
+              <a:t>Potential Models</a:t>
             </a:r>
           </a:p>
           <a:p>
             <a:r>
               <a:rPr lang="en-US" dirty="0"/>
-              <a:t>Visual appeal</a:t>
+              <a:t>Comparing Models</a:t>
             </a:r>
           </a:p>
           <a:p>
             <a:r>
               <a:rPr lang="en-US" dirty="0"/>
-              <a:t>Effective delivery techniques</a:t>
+              <a:t>Predictions for 2025</a:t>
             </a:r>
           </a:p>
           <a:p>
             <a:r>
               <a:rPr lang="en-US" dirty="0"/>
-              <a:t>Q&amp;A</a:t>
+              <a:t>Growth Factors</a:t>
             </a:r>
           </a:p>
         </p:txBody>
@@ -17601,7 +17676,7 @@
           <a:p>
             <a:fld id="{2990712A-E8AC-4933-9DE4-16CA7BD51374}" type="datetime1">
               <a:rPr lang="en-US" smtClean="0"/>
-              <a:t>3/2/2026</a:t>
+              <a:t>3/11/2026</a:t>
             </a:fld>
             <a:endParaRPr lang="en-US" dirty="0"/>
           </a:p>
@@ -17832,7 +17907,7 @@
           <a:p>
             <a:fld id="{AABDD37E-812B-468F-B489-3911FC6F6723}" type="datetime1">
               <a:rPr lang="en-US" smtClean="0"/>
-              <a:t>3/2/2026</a:t>
+              <a:t>3/11/2026</a:t>
             </a:fld>
             <a:endParaRPr lang="en-US" dirty="0"/>
           </a:p>
@@ -18015,7 +18090,7 @@
           <a:p>
             <a:fld id="{F3C46E4F-8270-497D-A4DE-9B37A9C4BC18}" type="datetime1">
               <a:rPr lang="en-US" smtClean="0"/>
-              <a:t>3/2/2026</a:t>
+              <a:t>3/11/2026</a:t>
             </a:fld>
             <a:endParaRPr lang="en-US" dirty="0"/>
           </a:p>
@@ -18201,7 +18276,7 @@
           <a:p>
             <a:fld id="{44E2E664-B024-4B15-A27C-3009EED3249B}" type="datetime1">
               <a:rPr lang="en-US" smtClean="0"/>
-              <a:t>3/2/2026</a:t>
+              <a:t>3/11/2026</a:t>
             </a:fld>
             <a:endParaRPr lang="en-US" dirty="0"/>
           </a:p>
@@ -18473,7 +18548,7 @@
           <a:p>
             <a:fld id="{D5376D00-6106-43BB-8923-18C7A7C520E4}" type="datetime1">
               <a:rPr lang="en-US" smtClean="0"/>
-              <a:t>3/2/2026</a:t>
+              <a:t>3/11/2026</a:t>
             </a:fld>
             <a:endParaRPr lang="en-US" dirty="0"/>
           </a:p>
@@ -18619,14 +18694,14 @@
             <p:ph idx="1"/>
             <p:extLst>
               <p:ext uri="{D42A27DB-BD31-4B8C-83A1-F6EECF244321}">
-                <p14:modId xmlns:p14="http://schemas.microsoft.com/office/powerpoint/2010/main" val="50819903"/>
+                <p14:modId xmlns:p14="http://schemas.microsoft.com/office/powerpoint/2010/main" val="3709283122"/>
               </p:ext>
             </p:extLst>
           </p:nvPr>
         </p:nvGraphicFramePr>
         <p:xfrm>
-          <a:off x="431173" y="1716088"/>
-          <a:ext cx="11148531" cy="4593274"/>
+          <a:off x="521734" y="2325688"/>
+          <a:ext cx="11148531" cy="2624728"/>
         </p:xfrm>
         <a:graphic>
           <a:graphicData uri="http://schemas.openxmlformats.org/drawingml/2006/table">
@@ -18665,7 +18740,7 @@
                     <a:p>
                       <a:r>
                         <a:rPr lang="en-US" sz="1800" b="1" dirty="0"/>
-                        <a:t>Area</a:t>
+                        <a:t>Model</a:t>
                       </a:r>
                     </a:p>
                   </a:txBody>
@@ -18678,7 +18753,7 @@
                     <a:p>
                       <a:r>
                         <a:rPr lang="en-US" sz="1800" b="1" dirty="0"/>
-                        <a:t>Impact on engagement</a:t>
+                        <a:t>Test RMSE</a:t>
                       </a:r>
                     </a:p>
                   </a:txBody>
@@ -18691,7 +18766,7 @@
                     <a:p>
                       <a:r>
                         <a:rPr lang="en-US" sz="1800" b="1" dirty="0"/>
-                        <a:t>Source</a:t>
+                        <a:t>2025 Prediction</a:t>
                       </a:r>
                     </a:p>
                   </a:txBody>
@@ -18711,7 +18786,7 @@
                     <a:p>
                       <a:r>
                         <a:rPr lang="en-US" sz="1800" b="0" dirty="0"/>
-                        <a:t>Eye contact</a:t>
+                        <a:t>Current (Linear) Model</a:t>
                       </a:r>
                     </a:p>
                   </a:txBody>
@@ -18722,9 +18797,34 @@
                     <a:bodyPr/>
                     <a:lstStyle/>
                     <a:p>
+                      <a:pPr marL="0" marR="0" lvl="0" indent="0" algn="l" defTabSz="914400" rtl="0" eaLnBrk="1" fontAlgn="auto" latinLnBrk="0" hangingPunct="1">
+                        <a:lnSpc>
+                          <a:spcPct val="100000"/>
+                        </a:lnSpc>
+                        <a:spcBef>
+                          <a:spcPts val="0"/>
+                        </a:spcBef>
+                        <a:spcAft>
+                          <a:spcPts val="0"/>
+                        </a:spcAft>
+                        <a:buClrTx/>
+                        <a:buSzTx/>
+                        <a:buFontTx/>
+                        <a:buNone/>
+                        <a:tabLst/>
+                        <a:defRPr/>
+                      </a:pPr>
                       <a:r>
-                        <a:rPr lang="en-US" sz="1800" b="0" dirty="0"/>
-                        <a:t>80% more audience connection</a:t>
+                        <a:rPr lang="en-US" sz="1800" b="0" i="0" kern="1200">
+                          <a:solidFill>
+                            <a:schemeClr val="dk1"/>
+                          </a:solidFill>
+                          <a:effectLst/>
+                          <a:latin typeface="+mn-lt"/>
+                          <a:ea typeface="+mn-ea"/>
+                          <a:cs typeface="+mn-cs"/>
+                        </a:rPr>
+                        <a:t>0.159</a:t>
                       </a:r>
                     </a:p>
                   </a:txBody>
@@ -18735,9 +18835,18 @@
                     <a:bodyPr/>
                     <a:lstStyle/>
                     <a:p>
+                      <a:pPr latinLnBrk="1"/>
                       <a:r>
-                        <a:rPr lang="en-US" sz="1800" b="0" dirty="0"/>
-                        <a:t>Business review</a:t>
+                        <a:rPr lang="en-US" sz="1800" b="0" i="0" kern="1200" dirty="0">
+                          <a:solidFill>
+                            <a:schemeClr val="dk1"/>
+                          </a:solidFill>
+                          <a:effectLst/>
+                          <a:latin typeface="+mn-lt"/>
+                          <a:ea typeface="+mn-ea"/>
+                          <a:cs typeface="+mn-cs"/>
+                        </a:rPr>
+                        <a:t>0.621</a:t>
                       </a:r>
                     </a:p>
                   </a:txBody>
@@ -18757,7 +18866,7 @@
                     <a:p>
                       <a:r>
                         <a:rPr lang="en-US" sz="1800" b="0" dirty="0"/>
-                        <a:t>Storytelling</a:t>
+                        <a:t>Spline Model</a:t>
                       </a:r>
                     </a:p>
                   </a:txBody>
@@ -18770,7 +18879,7 @@
                     <a:p>
                       <a:r>
                         <a:rPr lang="en-US" sz="1800" b="0" dirty="0"/>
-                        <a:t>Increases retention by 22x</a:t>
+                        <a:t>0.454</a:t>
                       </a:r>
                     </a:p>
                   </a:txBody>
@@ -18781,9 +18890,18 @@
                     <a:bodyPr/>
                     <a:lstStyle/>
                     <a:p>
+                      <a:pPr latinLnBrk="1"/>
                       <a:r>
-                        <a:rPr lang="en-US" sz="1800" b="0" dirty="0"/>
-                        <a:t>University study</a:t>
+                        <a:rPr lang="en-US" sz="1800" b="0" i="0" kern="1200" dirty="0">
+                          <a:solidFill>
+                            <a:schemeClr val="dk1"/>
+                          </a:solidFill>
+                          <a:effectLst/>
+                          <a:latin typeface="+mn-lt"/>
+                          <a:ea typeface="+mn-ea"/>
+                          <a:cs typeface="+mn-cs"/>
+                        </a:rPr>
+                        <a:t>0.637</a:t>
                       </a:r>
                     </a:p>
                   </a:txBody>
@@ -18803,7 +18921,7 @@
                     <a:p>
                       <a:r>
                         <a:rPr lang="en-US" sz="1800" b="0" dirty="0"/>
-                        <a:t>Interactive polls</a:t>
+                        <a:t>Prophet Model</a:t>
                       </a:r>
                     </a:p>
                   </a:txBody>
@@ -18816,7 +18934,7 @@
                     <a:p>
                       <a:r>
                         <a:rPr lang="en-US" sz="1800" b="0" dirty="0"/>
-                        <a:t>Leads to 34% higher engagement</a:t>
+                        <a:t>0.136</a:t>
                       </a:r>
                     </a:p>
                   </a:txBody>
@@ -18827,9 +18945,34 @@
                     <a:bodyPr/>
                     <a:lstStyle/>
                     <a:p>
+                      <a:pPr marL="0" marR="0" lvl="0" indent="0" algn="l" defTabSz="914400" rtl="0" eaLnBrk="1" fontAlgn="auto" latinLnBrk="0" hangingPunct="1">
+                        <a:lnSpc>
+                          <a:spcPct val="100000"/>
+                        </a:lnSpc>
+                        <a:spcBef>
+                          <a:spcPts val="0"/>
+                        </a:spcBef>
+                        <a:spcAft>
+                          <a:spcPts val="0"/>
+                        </a:spcAft>
+                        <a:buClrTx/>
+                        <a:buSzTx/>
+                        <a:buFontTx/>
+                        <a:buNone/>
+                        <a:tabLst/>
+                        <a:defRPr/>
+                      </a:pPr>
                       <a:r>
-                        <a:rPr lang="en-US" sz="1800" b="0" dirty="0"/>
-                        <a:t>LinkedIn</a:t>
+                        <a:rPr lang="en-US" sz="1800" b="0" i="0" kern="1200" dirty="0">
+                          <a:solidFill>
+                            <a:schemeClr val="dk1"/>
+                          </a:solidFill>
+                          <a:effectLst/>
+                          <a:latin typeface="+mn-lt"/>
+                          <a:ea typeface="+mn-ea"/>
+                          <a:cs typeface="+mn-cs"/>
+                        </a:rPr>
+                        <a:t>0.518</a:t>
                       </a:r>
                     </a:p>
                   </a:txBody>
@@ -18841,144 +18984,6 @@
                   </a:ext>
                 </a:extLst>
               </a:tr>
-              <a:tr h="656182">
-                <a:tc>
-                  <a:txBody>
-                    <a:bodyPr/>
-                    <a:lstStyle/>
-                    <a:p>
-                      <a:r>
-                        <a:rPr lang="en-US" sz="1800" b="0" dirty="0"/>
-                        <a:t>Visual aids</a:t>
-                      </a:r>
-                    </a:p>
-                  </a:txBody>
-                  <a:tcPr anchor="ctr"/>
-                </a:tc>
-                <a:tc>
-                  <a:txBody>
-                    <a:bodyPr/>
-                    <a:lstStyle/>
-                    <a:p>
-                      <a:r>
-                        <a:rPr lang="en-US" sz="1800" b="0" dirty="0"/>
-                        <a:t>Boosts retention by 65%</a:t>
-                      </a:r>
-                    </a:p>
-                  </a:txBody>
-                  <a:tcPr anchor="ctr"/>
-                </a:tc>
-                <a:tc>
-                  <a:txBody>
-                    <a:bodyPr/>
-                    <a:lstStyle/>
-                    <a:p>
-                      <a:r>
-                        <a:rPr lang="en-US" sz="1800" b="0" dirty="0"/>
-                        <a:t>Company research</a:t>
-                      </a:r>
-                    </a:p>
-                  </a:txBody>
-                  <a:tcPr anchor="ctr"/>
-                </a:tc>
-                <a:extLst>
-                  <a:ext uri="{0D108BD9-81ED-4DB2-BD59-A6C34878D82A}">
-                    <a16:rowId xmlns:a16="http://schemas.microsoft.com/office/drawing/2014/main" val="4031271249"/>
-                  </a:ext>
-                </a:extLst>
-              </a:tr>
-              <a:tr h="656182">
-                <a:tc>
-                  <a:txBody>
-                    <a:bodyPr/>
-                    <a:lstStyle/>
-                    <a:p>
-                      <a:r>
-                        <a:rPr lang="en-US" sz="1800" b="0" dirty="0"/>
-                        <a:t>Attention spans</a:t>
-                      </a:r>
-                    </a:p>
-                  </a:txBody>
-                  <a:tcPr anchor="ctr"/>
-                </a:tc>
-                <a:tc>
-                  <a:txBody>
-                    <a:bodyPr/>
-                    <a:lstStyle/>
-                    <a:p>
-                      <a:r>
-                        <a:rPr lang="en-US" sz="1800" b="0" dirty="0"/>
-                        <a:t>Lasts about 5 minutes</a:t>
-                      </a:r>
-                    </a:p>
-                  </a:txBody>
-                  <a:tcPr anchor="ctr"/>
-                </a:tc>
-                <a:tc>
-                  <a:txBody>
-                    <a:bodyPr/>
-                    <a:lstStyle/>
-                    <a:p>
-                      <a:r>
-                        <a:rPr lang="en-US" sz="1800" b="0" dirty="0"/>
-                        <a:t>Journal article</a:t>
-                      </a:r>
-                    </a:p>
-                  </a:txBody>
-                  <a:tcPr anchor="ctr"/>
-                </a:tc>
-                <a:extLst>
-                  <a:ext uri="{0D108BD9-81ED-4DB2-BD59-A6C34878D82A}">
-                    <a16:rowId xmlns:a16="http://schemas.microsoft.com/office/drawing/2014/main" val="2924049109"/>
-                  </a:ext>
-                </a:extLst>
-              </a:tr>
-              <a:tr h="656182">
-                <a:tc>
-                  <a:txBody>
-                    <a:bodyPr/>
-                    <a:lstStyle/>
-                    <a:p>
-                      <a:r>
-                        <a:rPr lang="en-US" sz="1800" b="0" dirty="0"/>
-                        <a:t>First impressions</a:t>
-                      </a:r>
-                    </a:p>
-                  </a:txBody>
-                  <a:tcPr anchor="ctr"/>
-                </a:tc>
-                <a:tc>
-                  <a:txBody>
-                    <a:bodyPr/>
-                    <a:lstStyle/>
-                    <a:p>
-                      <a:r>
-                        <a:rPr lang="en-US" sz="1800" b="0" dirty="0"/>
-                        <a:t>Made in the first 15 seconds</a:t>
-                      </a:r>
-                    </a:p>
-                  </a:txBody>
-                  <a:tcPr anchor="ctr"/>
-                </a:tc>
-                <a:tc>
-                  <a:txBody>
-                    <a:bodyPr/>
-                    <a:lstStyle/>
-                    <a:p>
-                      <a:r>
-                        <a:rPr lang="en-US" sz="1800" b="0" dirty="0"/>
-                        <a:t>Industry report</a:t>
-                      </a:r>
-                    </a:p>
-                  </a:txBody>
-                  <a:tcPr anchor="ctr"/>
-                </a:tc>
-                <a:extLst>
-                  <a:ext uri="{0D108BD9-81ED-4DB2-BD59-A6C34878D82A}">
-                    <a16:rowId xmlns:a16="http://schemas.microsoft.com/office/drawing/2014/main" val="1861033052"/>
-                  </a:ext>
-                </a:extLst>
-              </a:tr>
             </a:tbl>
           </a:graphicData>
         </a:graphic>
@@ -19006,7 +19011,7 @@
           <a:p>
             <a:fld id="{1ABC5C81-4B4A-4C1A-B255-174CB9D3D2AE}" type="datetime1">
               <a:rPr lang="en-US" smtClean="0"/>
-              <a:t>3/2/2026</a:t>
+              <a:t>3/11/2026</a:t>
             </a:fld>
             <a:endParaRPr lang="en-US" dirty="0"/>
           </a:p>
@@ -19311,7 +19316,7 @@
           <a:p>
             <a:fld id="{CE5A4445-5DD2-41DC-BDE3-6A90E266904E}" type="datetime1">
               <a:rPr lang="en-US" smtClean="0"/>
-              <a:t>3/2/2026</a:t>
+              <a:t>3/11/2026</a:t>
             </a:fld>
             <a:endParaRPr lang="en-US" dirty="0"/>
           </a:p>
@@ -19485,7 +19490,7 @@
           <a:p>
             <a:fld id="{FE998514-CB2E-43FF-940B-F99B0EA9BFC0}" type="datetime1">
               <a:rPr lang="en-US" smtClean="0"/>
-              <a:t>3/2/2026</a:t>
+              <a:t>3/11/2026</a:t>
             </a:fld>
             <a:endParaRPr lang="en-US" dirty="0"/>
           </a:p>
@@ -20060,35 +20065,6 @@
 </file>
 
 <file path=customXml/item1.xml><?xml version="1.0" encoding="utf-8"?>
-<p:properties xmlns:p="http://schemas.microsoft.com/office/2006/metadata/properties" xmlns:xsi="http://www.w3.org/2001/XMLSchema-instance" xmlns:pc="http://schemas.microsoft.com/office/infopath/2007/PartnerControls">
-  <documentManagement>
-    <_ip_UnifiedCompliancePolicyUIAction xmlns="http://schemas.microsoft.com/sharepoint/v3" xsi:nil="true"/>
-    <Image xmlns="71af3243-3dd4-4a8d-8c0d-dd76da1f02a5">
-      <Url xsi:nil="true"/>
-      <Description xsi:nil="true"/>
-    </Image>
-    <Status xmlns="71af3243-3dd4-4a8d-8c0d-dd76da1f02a5">Not started</Status>
-    <Background xmlns="71af3243-3dd4-4a8d-8c0d-dd76da1f02a5">false</Background>
-    <_ip_UnifiedCompliancePolicyProperties xmlns="http://schemas.microsoft.com/sharepoint/v3" xsi:nil="true"/>
-    <ImageTagsTaxHTField xmlns="71af3243-3dd4-4a8d-8c0d-dd76da1f02a5">
-      <Terms xmlns="http://schemas.microsoft.com/office/infopath/2007/PartnerControls"/>
-    </ImageTagsTaxHTField>
-    <TaxCatchAll xmlns="230e9df3-be65-4c73-a93b-d1236ebd677e" xsi:nil="true"/>
-    <MediaServiceKeyPoints xmlns="71af3243-3dd4-4a8d-8c0d-dd76da1f02a5" xsi:nil="true"/>
-  </documentManagement>
-</p:properties>
-</file>
-
-<file path=customXml/item2.xml><?xml version="1.0" encoding="utf-8"?>
-<?mso-contentType ?>
-<FormTemplates xmlns="http://schemas.microsoft.com/sharepoint/v3/contenttype/forms">
-  <Display>DocumentLibraryForm</Display>
-  <Edit>DocumentLibraryForm</Edit>
-  <New>DocumentLibraryForm</New>
-</FormTemplates>
-</file>
-
-<file path=customXml/item3.xml><?xml version="1.0" encoding="utf-8"?>
 <ct:contentTypeSchema xmlns:ct="http://schemas.microsoft.com/office/2006/metadata/contentType" xmlns:ma="http://schemas.microsoft.com/office/2006/metadata/properties/metaAttributes" ct:_="" ma:_="" ma:contentTypeName="Document" ma:contentTypeID="0x01010079F111ED35F8CC479449609E8A0923A6" ma:contentTypeVersion="30" ma:contentTypeDescription="Create a new document." ma:contentTypeScope="" ma:versionID="cec0622158e8f13124e9e8fd4de31bd1">
   <xsd:schema xmlns:xsd="http://www.w3.org/2001/XMLSchema" xmlns:xs="http://www.w3.org/2001/XMLSchema" xmlns:p="http://schemas.microsoft.com/office/2006/metadata/properties" xmlns:ns1="http://schemas.microsoft.com/sharepoint/v3" xmlns:ns2="71af3243-3dd4-4a8d-8c0d-dd76da1f02a5" xmlns:ns3="16c05727-aa75-4e4a-9b5f-8a80a1165891" xmlns:ns4="230e9df3-be65-4c73-a93b-d1236ebd677e" targetNamespace="http://schemas.microsoft.com/office/2006/metadata/properties" ma:root="true" ma:fieldsID="3b52f30ab005d15df08657af532e6e38" ns1:_="" ns2:_="" ns3:_="" ns4:_="">
     <xsd:import namespace="http://schemas.microsoft.com/sharepoint/v3"/>
@@ -20406,27 +20382,36 @@
 </ct:contentTypeSchema>
 </file>
 
-<file path=customXml/itemProps1.xml><?xml version="1.0" encoding="utf-8"?>
-<ds:datastoreItem xmlns:ds="http://schemas.openxmlformats.org/officeDocument/2006/customXml" ds:itemID="{BD6282DC-5D67-4C19-9A05-C65D9BF7BC78}">
-  <ds:schemaRefs>
-    <ds:schemaRef ds:uri="http://schemas.microsoft.com/office/2006/metadata/properties"/>
-    <ds:schemaRef ds:uri="http://schemas.microsoft.com/office/infopath/2007/PartnerControls"/>
-    <ds:schemaRef ds:uri="http://schemas.microsoft.com/sharepoint/v3"/>
-    <ds:schemaRef ds:uri="71af3243-3dd4-4a8d-8c0d-dd76da1f02a5"/>
-    <ds:schemaRef ds:uri="230e9df3-be65-4c73-a93b-d1236ebd677e"/>
-  </ds:schemaRefs>
-</ds:datastoreItem>
+<file path=customXml/item2.xml><?xml version="1.0" encoding="utf-8"?>
+<?mso-contentType ?>
+<FormTemplates xmlns="http://schemas.microsoft.com/sharepoint/v3/contenttype/forms">
+  <Display>DocumentLibraryForm</Display>
+  <Edit>DocumentLibraryForm</Edit>
+  <New>DocumentLibraryForm</New>
+</FormTemplates>
 </file>
 
-<file path=customXml/itemProps2.xml><?xml version="1.0" encoding="utf-8"?>
-<ds:datastoreItem xmlns:ds="http://schemas.openxmlformats.org/officeDocument/2006/customXml" ds:itemID="{73667383-B7F3-43FC-8965-135FDDEABCC5}">
-  <ds:schemaRefs>
-    <ds:schemaRef ds:uri="http://schemas.microsoft.com/sharepoint/v3/contenttype/forms"/>
-  </ds:schemaRefs>
-</ds:datastoreItem>
+<file path=customXml/item3.xml><?xml version="1.0" encoding="utf-8"?>
+<p:properties xmlns:p="http://schemas.microsoft.com/office/2006/metadata/properties" xmlns:xsi="http://www.w3.org/2001/XMLSchema-instance" xmlns:pc="http://schemas.microsoft.com/office/infopath/2007/PartnerControls">
+  <documentManagement>
+    <_ip_UnifiedCompliancePolicyUIAction xmlns="http://schemas.microsoft.com/sharepoint/v3" xsi:nil="true"/>
+    <Image xmlns="71af3243-3dd4-4a8d-8c0d-dd76da1f02a5">
+      <Url xsi:nil="true"/>
+      <Description xsi:nil="true"/>
+    </Image>
+    <Status xmlns="71af3243-3dd4-4a8d-8c0d-dd76da1f02a5">Not started</Status>
+    <Background xmlns="71af3243-3dd4-4a8d-8c0d-dd76da1f02a5">false</Background>
+    <_ip_UnifiedCompliancePolicyProperties xmlns="http://schemas.microsoft.com/sharepoint/v3" xsi:nil="true"/>
+    <ImageTagsTaxHTField xmlns="71af3243-3dd4-4a8d-8c0d-dd76da1f02a5">
+      <Terms xmlns="http://schemas.microsoft.com/office/infopath/2007/PartnerControls"/>
+    </ImageTagsTaxHTField>
+    <TaxCatchAll xmlns="230e9df3-be65-4c73-a93b-d1236ebd677e" xsi:nil="true"/>
+    <MediaServiceKeyPoints xmlns="71af3243-3dd4-4a8d-8c0d-dd76da1f02a5" xsi:nil="true"/>
+  </documentManagement>
+</p:properties>
 </file>
 
-<file path=customXml/itemProps3.xml><?xml version="1.0" encoding="utf-8"?>
+<file path=customXml/itemProps1.xml><?xml version="1.0" encoding="utf-8"?>
 <ds:datastoreItem xmlns:ds="http://schemas.openxmlformats.org/officeDocument/2006/customXml" ds:itemID="{12135656-72CC-4564-823F-B30D0299644B}">
   <ds:schemaRefs>
     <ds:schemaRef ds:uri="http://schemas.microsoft.com/office/2006/metadata/contentType"/>
@@ -20447,6 +20432,26 @@
 </ds:datastoreItem>
 </file>
 
+<file path=customXml/itemProps2.xml><?xml version="1.0" encoding="utf-8"?>
+<ds:datastoreItem xmlns:ds="http://schemas.openxmlformats.org/officeDocument/2006/customXml" ds:itemID="{73667383-B7F3-43FC-8965-135FDDEABCC5}">
+  <ds:schemaRefs>
+    <ds:schemaRef ds:uri="http://schemas.microsoft.com/sharepoint/v3/contenttype/forms"/>
+  </ds:schemaRefs>
+</ds:datastoreItem>
+</file>
+
+<file path=customXml/itemProps3.xml><?xml version="1.0" encoding="utf-8"?>
+<ds:datastoreItem xmlns:ds="http://schemas.openxmlformats.org/officeDocument/2006/customXml" ds:itemID="{BD6282DC-5D67-4C19-9A05-C65D9BF7BC78}">
+  <ds:schemaRefs>
+    <ds:schemaRef ds:uri="http://schemas.microsoft.com/office/2006/metadata/properties"/>
+    <ds:schemaRef ds:uri="http://schemas.microsoft.com/office/infopath/2007/PartnerControls"/>
+    <ds:schemaRef ds:uri="http://schemas.microsoft.com/sharepoint/v3"/>
+    <ds:schemaRef ds:uri="71af3243-3dd4-4a8d-8c0d-dd76da1f02a5"/>
+    <ds:schemaRef ds:uri="230e9df3-be65-4c73-a93b-d1236ebd677e"/>
+  </ds:schemaRefs>
+</ds:datastoreItem>
+</file>
+
 <file path=docMetadata/LabelInfo.xml><?xml version="1.0" encoding="utf-8"?>
 <clbl:labelList xmlns:clbl="http://schemas.microsoft.com/office/2020/mipLabelMetadata"/>
 </file>
--- a/Presentation_Deck.pptx
+++ b/Presentation_Deck.pptx
@@ -19130,8 +19130,13 @@
           <a:p>
             <a:r>
               <a:rPr lang="en-US" dirty="0"/>
-              <a:t>Why visuals matter</a:t>
-            </a:r>
+              <a:t>Why </a:t>
+            </a:r>
+            <a:r>
+              <a:rPr lang="en-US"/>
+              <a:t>visuals matter!</a:t>
+            </a:r>
+            <a:endParaRPr lang="en-US" dirty="0"/>
           </a:p>
         </p:txBody>
       </p:sp>
@@ -20065,6 +20070,15 @@
 </file>
 
 <file path=customXml/item1.xml><?xml version="1.0" encoding="utf-8"?>
+<?mso-contentType ?>
+<FormTemplates xmlns="http://schemas.microsoft.com/sharepoint/v3/contenttype/forms">
+  <Display>DocumentLibraryForm</Display>
+  <Edit>DocumentLibraryForm</Edit>
+  <New>DocumentLibraryForm</New>
+</FormTemplates>
+</file>
+
+<file path=customXml/item2.xml><?xml version="1.0" encoding="utf-8"?>
 <ct:contentTypeSchema xmlns:ct="http://schemas.microsoft.com/office/2006/metadata/contentType" xmlns:ma="http://schemas.microsoft.com/office/2006/metadata/properties/metaAttributes" ct:_="" ma:_="" ma:contentTypeName="Document" ma:contentTypeID="0x01010079F111ED35F8CC479449609E8A0923A6" ma:contentTypeVersion="30" ma:contentTypeDescription="Create a new document." ma:contentTypeScope="" ma:versionID="cec0622158e8f13124e9e8fd4de31bd1">
   <xsd:schema xmlns:xsd="http://www.w3.org/2001/XMLSchema" xmlns:xs="http://www.w3.org/2001/XMLSchema" xmlns:p="http://schemas.microsoft.com/office/2006/metadata/properties" xmlns:ns1="http://schemas.microsoft.com/sharepoint/v3" xmlns:ns2="71af3243-3dd4-4a8d-8c0d-dd76da1f02a5" xmlns:ns3="16c05727-aa75-4e4a-9b5f-8a80a1165891" xmlns:ns4="230e9df3-be65-4c73-a93b-d1236ebd677e" targetNamespace="http://schemas.microsoft.com/office/2006/metadata/properties" ma:root="true" ma:fieldsID="3b52f30ab005d15df08657af532e6e38" ns1:_="" ns2:_="" ns3:_="" ns4:_="">
     <xsd:import namespace="http://schemas.microsoft.com/sharepoint/v3"/>
@@ -20382,15 +20396,6 @@
 </ct:contentTypeSchema>
 </file>
 
-<file path=customXml/item2.xml><?xml version="1.0" encoding="utf-8"?>
-<?mso-contentType ?>
-<FormTemplates xmlns="http://schemas.microsoft.com/sharepoint/v3/contenttype/forms">
-  <Display>DocumentLibraryForm</Display>
-  <Edit>DocumentLibraryForm</Edit>
-  <New>DocumentLibraryForm</New>
-</FormTemplates>
-</file>
-
 <file path=customXml/item3.xml><?xml version="1.0" encoding="utf-8"?>
 <p:properties xmlns:p="http://schemas.microsoft.com/office/2006/metadata/properties" xmlns:xsi="http://www.w3.org/2001/XMLSchema-instance" xmlns:pc="http://schemas.microsoft.com/office/infopath/2007/PartnerControls">
   <documentManagement>
@@ -20412,6 +20417,14 @@
 </file>
 
 <file path=customXml/itemProps1.xml><?xml version="1.0" encoding="utf-8"?>
+<ds:datastoreItem xmlns:ds="http://schemas.openxmlformats.org/officeDocument/2006/customXml" ds:itemID="{73667383-B7F3-43FC-8965-135FDDEABCC5}">
+  <ds:schemaRefs>
+    <ds:schemaRef ds:uri="http://schemas.microsoft.com/sharepoint/v3/contenttype/forms"/>
+  </ds:schemaRefs>
+</ds:datastoreItem>
+</file>
+
+<file path=customXml/itemProps2.xml><?xml version="1.0" encoding="utf-8"?>
 <ds:datastoreItem xmlns:ds="http://schemas.openxmlformats.org/officeDocument/2006/customXml" ds:itemID="{12135656-72CC-4564-823F-B30D0299644B}">
   <ds:schemaRefs>
     <ds:schemaRef ds:uri="http://schemas.microsoft.com/office/2006/metadata/contentType"/>
@@ -20432,14 +20445,6 @@
 </ds:datastoreItem>
 </file>
 
-<file path=customXml/itemProps2.xml><?xml version="1.0" encoding="utf-8"?>
-<ds:datastoreItem xmlns:ds="http://schemas.openxmlformats.org/officeDocument/2006/customXml" ds:itemID="{73667383-B7F3-43FC-8965-135FDDEABCC5}">
-  <ds:schemaRefs>
-    <ds:schemaRef ds:uri="http://schemas.microsoft.com/sharepoint/v3/contenttype/forms"/>
-  </ds:schemaRefs>
-</ds:datastoreItem>
-</file>
-
 <file path=customXml/itemProps3.xml><?xml version="1.0" encoding="utf-8"?>
 <ds:datastoreItem xmlns:ds="http://schemas.openxmlformats.org/officeDocument/2006/customXml" ds:itemID="{BD6282DC-5D67-4C19-9A05-C65D9BF7BC78}">
   <ds:schemaRefs>

--- a/Presentation_Deck.pptx
+++ b/Presentation_Deck.pptx
@@ -141,7 +141,7 @@
   <pc:docChgLst>
     <pc:chgData name="Matthew Wilson" userId="d30e82ce5d04d96e" providerId="LiveId" clId="{D2507071-FEA3-4BC0-92A6-71207631F648}"/>
     <pc:docChg chg="undo custSel modSld">
-      <pc:chgData name="Matthew Wilson" userId="d30e82ce5d04d96e" providerId="LiveId" clId="{D2507071-FEA3-4BC0-92A6-71207631F648}" dt="2026-03-11T17:22:17.067" v="455" actId="20577"/>
+      <pc:chgData name="Matthew Wilson" userId="d30e82ce5d04d96e" providerId="LiveId" clId="{D2507071-FEA3-4BC0-92A6-71207631F648}" dt="2026-03-11T17:30:09.612" v="458" actId="20577"/>
       <pc:docMkLst>
         <pc:docMk/>
       </pc:docMkLst>
@@ -157,6 +157,21 @@
             <pc:docMk/>
             <pc:sldMk cId="4216523365" sldId="257"/>
             <ac:spMk id="3" creationId="{432C04E6-B771-F1FA-85F4-B7984DE55A8E}"/>
+          </ac:spMkLst>
+        </pc:spChg>
+      </pc:sldChg>
+      <pc:sldChg chg="modSp mod">
+        <pc:chgData name="Matthew Wilson" userId="d30e82ce5d04d96e" providerId="LiveId" clId="{D2507071-FEA3-4BC0-92A6-71207631F648}" dt="2026-03-11T17:30:09.612" v="458" actId="20577"/>
+        <pc:sldMkLst>
+          <pc:docMk/>
+          <pc:sldMk cId="3313450045" sldId="258"/>
+        </pc:sldMkLst>
+        <pc:spChg chg="mod">
+          <ac:chgData name="Matthew Wilson" userId="d30e82ce5d04d96e" providerId="LiveId" clId="{D2507071-FEA3-4BC0-92A6-71207631F648}" dt="2026-03-11T17:30:09.612" v="458" actId="20577"/>
+          <ac:spMkLst>
+            <pc:docMk/>
+            <pc:sldMk cId="3313450045" sldId="258"/>
+            <ac:spMk id="2" creationId="{8AA144A5-0283-F980-85F3-EE51746FC4CD}"/>
           </ac:spMkLst>
         </pc:spChg>
       </pc:sldChg>
@@ -17797,9 +17812,10 @@
           <a:lstStyle/>
           <a:p>
             <a:r>
-              <a:rPr lang="en-US" dirty="0"/>
-              <a:t>Introduction</a:t>
-            </a:r>
+              <a:rPr lang="en-US"/>
+              <a:t>Introduction bb</a:t>
+            </a:r>
+            <a:endParaRPr lang="en-US" dirty="0"/>
           </a:p>
         </p:txBody>
       </p:sp>
@@ -18815,7 +18831,7 @@
                         <a:defRPr/>
                       </a:pPr>
                       <a:r>
-                        <a:rPr lang="en-US" sz="1800" b="0" i="0" kern="1200">
+                        <a:rPr lang="en-US" sz="1800" b="0" i="0" kern="1200" dirty="0">
                           <a:solidFill>
                             <a:schemeClr val="dk1"/>
                           </a:solidFill>
